--- a/e2e/fixtures/chart-gallery.pptx
+++ b/e2e/fixtures/chart-gallery.pptx
@@ -2779,8 +2779,8 @@
           <a:ext cx="8001000" cy="4000500"/>
         </p:xfrm>
         <a:graphic>
-          <a:graphicData uri="http://schemas.openxmlformats.org/drawingml/2006/chart">
-            <c:chart xmlns:c="http://schemas.openxmlformats.org/drawingml/2006/chart" xmlns:r="http://schemas.openxmlformats.org/officeDocument/2006/relationships" r:id="rId2"/>
+          <a:graphicData uri="http://schemas.microsoft.com/office/drawing/2014/chartex">
+            <cx:chart xmlns:cx="http://schemas.microsoft.com/office/drawing/2014/chartex" xmlns:r="http://schemas.openxmlformats.org/officeDocument/2006/relationships" r:id="rId2"/>
           </a:graphicData>
         </a:graphic>
       </p:graphicFrame>
@@ -2849,8 +2849,8 @@
           <a:ext cx="8001000" cy="4000500"/>
         </p:xfrm>
         <a:graphic>
-          <a:graphicData uri="http://schemas.openxmlformats.org/drawingml/2006/chart">
-            <c:chart xmlns:c="http://schemas.openxmlformats.org/drawingml/2006/chart" xmlns:r="http://schemas.openxmlformats.org/officeDocument/2006/relationships" r:id="rId2"/>
+          <a:graphicData uri="http://schemas.microsoft.com/office/drawing/2014/chartex">
+            <cx:chart xmlns:cx="http://schemas.microsoft.com/office/drawing/2014/chartex" xmlns:r="http://schemas.openxmlformats.org/officeDocument/2006/relationships" r:id="rId2"/>
           </a:graphicData>
         </a:graphic>
       </p:graphicFrame>
@@ -2919,8 +2919,8 @@
           <a:ext cx="8001000" cy="4000500"/>
         </p:xfrm>
         <a:graphic>
-          <a:graphicData uri="http://schemas.openxmlformats.org/drawingml/2006/chart">
-            <c:chart xmlns:c="http://schemas.openxmlformats.org/drawingml/2006/chart" xmlns:r="http://schemas.openxmlformats.org/officeDocument/2006/relationships" r:id="rId2"/>
+          <a:graphicData uri="http://schemas.microsoft.com/office/drawing/2014/chartex">
+            <cx:chart xmlns:cx="http://schemas.microsoft.com/office/drawing/2014/chartex" xmlns:r="http://schemas.openxmlformats.org/officeDocument/2006/relationships" r:id="rId2"/>
           </a:graphicData>
         </a:graphic>
       </p:graphicFrame>
@@ -2989,8 +2989,8 @@
           <a:ext cx="8001000" cy="4000500"/>
         </p:xfrm>
         <a:graphic>
-          <a:graphicData uri="http://schemas.openxmlformats.org/drawingml/2006/chart">
-            <c:chart xmlns:c="http://schemas.openxmlformats.org/drawingml/2006/chart" xmlns:r="http://schemas.openxmlformats.org/officeDocument/2006/relationships" r:id="rId2"/>
+          <a:graphicData uri="http://schemas.microsoft.com/office/drawing/2014/chartex">
+            <cx:chart xmlns:cx="http://schemas.microsoft.com/office/drawing/2014/chartex" xmlns:r="http://schemas.openxmlformats.org/officeDocument/2006/relationships" r:id="rId2"/>
           </a:graphicData>
         </a:graphic>
       </p:graphicFrame>

--- a/e2e/fixtures/chart-gallery.pptx
+++ b/e2e/fixtures/chart-gallery.pptx
@@ -2562,7 +2562,7 @@
           <a:spcPct val="20000"/>
         </a:spcBef>
         <a:buFont typeface="Arial" panose="020B0604020202020204" pitchFamily="34" charset="0"/>
-        <a:buChar char="&amp;#x2022;"/>
+        <a:buChar char="•"/>
         <a:defRPr sz="3200" kern="1200">
           <a:solidFill>
             <a:schemeClr val="tx1"/>

--- a/e2e/fixtures/chart-gallery.pptx
+++ b/e2e/fixtures/chart-gallery.pptx
@@ -19,6 +19,12 @@
     <p:sldId id="267" r:id="rId17"/>
     <p:sldId id="268" r:id="rId18"/>
     <p:sldId id="269" r:id="rId19"/>
+    <p:sldId id="270" r:id="rId20"/>
+    <p:sldId id="271" r:id="rId21"/>
+    <p:sldId id="272" r:id="rId22"/>
+    <p:sldId id="273" r:id="rId23"/>
+    <p:sldId id="274" r:id="rId24"/>
+    <p:sldId id="275" r:id="rId25"/>
   </p:sldIdLst>
   <p:sldSz cx="12192000" cy="6858000"/>
   <p:notesSz cx="6858000" cy="12192000"/>
@@ -793,6 +799,916 @@
 </cx:chartSpace>
 </file>
 
+<file path=ppt/charts/chart15.xml><?xml version="1.0" encoding="utf-8"?>
+<c:chartSpace xmlns:c="http://schemas.openxmlformats.org/drawingml/2006/chart" xmlns:a="http://schemas.openxmlformats.org/drawingml/2006/main" xmlns:r="http://schemas.openxmlformats.org/officeDocument/2006/relationships">
+  <c:chart>
+    <c:title>
+      <c:tx>
+        <c:rich>
+          <a:bodyPr/>
+          <a:p>
+            <a:r>
+              <a:t>Combo</a:t>
+            </a:r>
+          </a:p>
+        </c:rich>
+      </c:tx>
+      <c:overlay val="0"/>
+    </c:title>
+    <c:autoTitleDeleted val="0"/>
+    <c:plotArea>
+      <c:layout/>
+      <c:barChart>
+        <c:barDir val="col"/>
+        <c:grouping val="clustered"/>
+        <c:ser>
+          <c:idx val="0"/>
+          <c:order val="0"/>
+          <c:tx>
+            <c:strRef>
+              <c:f>Sheet1!$B$1</c:f>
+              <c:strCache>
+                <c:ptCount val="1"/>
+                <c:pt idx="0">
+                  <c:v>Revenue</c:v>
+                </c:pt>
+              </c:strCache>
+            </c:strRef>
+          </c:tx>
+          <c:spPr>
+            <a:solidFill>
+              <a:srgbClr val="4472C4"/>
+            </a:solidFill>
+          </c:spPr>
+          <c:cat>
+            <c:strRef>
+              <c:f>Sheet1!$A$2:$A$5</c:f>
+              <c:strCache>
+                <c:ptCount val="4"/>
+                <c:pt idx="0">
+                  <c:v>Q1</c:v>
+                </c:pt>
+                <c:pt idx="1">
+                  <c:v>Q2</c:v>
+                </c:pt>
+                <c:pt idx="2">
+                  <c:v>Q3</c:v>
+                </c:pt>
+                <c:pt idx="3">
+                  <c:v>Q4</c:v>
+                </c:pt>
+              </c:strCache>
+            </c:strRef>
+          </c:cat>
+          <c:val>
+            <c:numRef>
+              <c:f>Sheet1!$B$2:$B$5</c:f>
+              <c:numCache>
+                <c:formatCode>General</c:formatCode>
+                <c:ptCount val="4"/>
+                <c:pt idx="0">
+                  <c:v>45</c:v>
+                </c:pt>
+                <c:pt idx="1">
+                  <c:v>62</c:v>
+                </c:pt>
+                <c:pt idx="2">
+                  <c:v>58</c:v>
+                </c:pt>
+                <c:pt idx="3">
+                  <c:v>71</c:v>
+                </c:pt>
+              </c:numCache>
+            </c:numRef>
+          </c:val>
+        </c:ser>
+        <c:gapWidth val="150"/>
+        <c:overlap val="-27"/>
+        <c:axId val="111111111"/>
+        <c:axId val="222222222"/>
+      </c:barChart>
+      <c:lineChart>
+        <c:grouping val="standard"/>
+        <c:ser>
+          <c:idx val="1"/>
+          <c:order val="1"/>
+          <c:tx>
+            <c:strRef>
+              <c:f>Sheet1!$B$1</c:f>
+              <c:strCache>
+                <c:ptCount val="1"/>
+                <c:pt idx="0">
+                  <c:v>Cost</c:v>
+                </c:pt>
+              </c:strCache>
+            </c:strRef>
+          </c:tx>
+          <c:spPr>
+            <a:ln>
+              <a:solidFill>
+                <a:srgbClr val="ED7D31"/>
+              </a:solidFill>
+            </a:ln>
+          </c:spPr>
+          <c:cat>
+            <c:strRef>
+              <c:f>Sheet1!$A$2:$A$5</c:f>
+              <c:strCache>
+                <c:ptCount val="4"/>
+                <c:pt idx="0">
+                  <c:v>Q1</c:v>
+                </c:pt>
+                <c:pt idx="1">
+                  <c:v>Q2</c:v>
+                </c:pt>
+                <c:pt idx="2">
+                  <c:v>Q3</c:v>
+                </c:pt>
+                <c:pt idx="3">
+                  <c:v>Q4</c:v>
+                </c:pt>
+              </c:strCache>
+            </c:strRef>
+          </c:cat>
+          <c:val>
+            <c:numRef>
+              <c:f>Sheet1!$B$2:$B$5</c:f>
+              <c:numCache>
+                <c:formatCode>General</c:formatCode>
+                <c:ptCount val="4"/>
+                <c:pt idx="0">
+                  <c:v>30</c:v>
+                </c:pt>
+                <c:pt idx="1">
+                  <c:v>41</c:v>
+                </c:pt>
+                <c:pt idx="2">
+                  <c:v>38</c:v>
+                </c:pt>
+                <c:pt idx="3">
+                  <c:v>52</c:v>
+                </c:pt>
+              </c:numCache>
+            </c:numRef>
+          </c:val>
+        </c:ser>
+        <c:ser>
+          <c:idx val="2"/>
+          <c:order val="2"/>
+          <c:tx>
+            <c:strRef>
+              <c:f>Sheet1!$B$1</c:f>
+              <c:strCache>
+                <c:ptCount val="1"/>
+                <c:pt idx="0">
+                  <c:v>Profit</c:v>
+                </c:pt>
+              </c:strCache>
+            </c:strRef>
+          </c:tx>
+          <c:spPr>
+            <a:ln>
+              <a:solidFill>
+                <a:srgbClr val="70AD47"/>
+              </a:solidFill>
+            </a:ln>
+          </c:spPr>
+          <c:cat>
+            <c:strRef>
+              <c:f>Sheet1!$A$2:$A$5</c:f>
+              <c:strCache>
+                <c:ptCount val="4"/>
+                <c:pt idx="0">
+                  <c:v>Q1</c:v>
+                </c:pt>
+                <c:pt idx="1">
+                  <c:v>Q2</c:v>
+                </c:pt>
+                <c:pt idx="2">
+                  <c:v>Q3</c:v>
+                </c:pt>
+                <c:pt idx="3">
+                  <c:v>Q4</c:v>
+                </c:pt>
+              </c:strCache>
+            </c:strRef>
+          </c:cat>
+          <c:val>
+            <c:numRef>
+              <c:f>Sheet1!$B$2:$B$5</c:f>
+              <c:numCache>
+                <c:formatCode>General</c:formatCode>
+                <c:ptCount val="4"/>
+                <c:pt idx="0">
+                  <c:v>18</c:v>
+                </c:pt>
+                <c:pt idx="1">
+                  <c:v>24</c:v>
+                </c:pt>
+                <c:pt idx="2">
+                  <c:v>29</c:v>
+                </c:pt>
+                <c:pt idx="3">
+                  <c:v>33</c:v>
+                </c:pt>
+              </c:numCache>
+            </c:numRef>
+          </c:val>
+        </c:ser>
+        <c:marker val="1"/>
+        <c:axId val="111111111"/>
+        <c:axId val="222222222"/>
+      </c:lineChart>
+      <c:catAx>
+        <c:axId val="111111111"/>
+        <c:scaling>
+          <c:orientation val="minMax"/>
+        </c:scaling>
+        <c:delete val="0"/>
+        <c:axPos val="b"/>
+        <c:crossAx val="222222222"/>
+      </c:catAx>
+      <c:valAx>
+        <c:axId val="222222222"/>
+        <c:scaling>
+          <c:orientation val="minMax"/>
+        </c:scaling>
+        <c:delete val="0"/>
+        <c:axPos val="l"/>
+        <c:crossAx val="111111111"/>
+      </c:valAx>
+    </c:plotArea>
+    <c:legend>
+      <c:legendPos val="b"/>
+      <c:overlay val="0"/>
+    </c:legend>
+    <c:plotVisOnly val="1"/>
+  </c:chart>
+</c:chartSpace>
+</file>
+
+<file path=ppt/charts/chart16.xml><?xml version="1.0" encoding="utf-8"?>
+<c:chartSpace xmlns:c="http://schemas.openxmlformats.org/drawingml/2006/chart" xmlns:a="http://schemas.openxmlformats.org/drawingml/2006/main" xmlns:r="http://schemas.openxmlformats.org/officeDocument/2006/relationships">
+  <c:chart>
+    <c:title>
+      <c:tx>
+        <c:rich>
+          <a:bodyPr/>
+          <a:p>
+            <a:r>
+              <a:t>Stock</a:t>
+            </a:r>
+          </a:p>
+        </c:rich>
+      </c:tx>
+      <c:overlay val="0"/>
+    </c:title>
+    <c:autoTitleDeleted val="0"/>
+    <c:plotArea>
+      <c:layout/>
+      <c:stockChart>
+        <c:ser>
+          <c:idx val="0"/>
+          <c:order val="0"/>
+          <c:tx>
+            <c:strRef>
+              <c:f>Sheet1!$B$1</c:f>
+              <c:strCache>
+                <c:ptCount val="1"/>
+                <c:pt idx="0">
+                  <c:v>Open</c:v>
+                </c:pt>
+              </c:strCache>
+            </c:strRef>
+          </c:tx>
+          <c:spPr>
+            <a:ln>
+              <a:noFill/>
+            </a:ln>
+          </c:spPr>
+          <c:cat>
+            <c:strRef>
+              <c:f>Sheet1!$A$2:$A$5</c:f>
+              <c:strCache>
+                <c:ptCount val="4"/>
+                <c:pt idx="0">
+                  <c:v>Q1</c:v>
+                </c:pt>
+                <c:pt idx="1">
+                  <c:v>Q2</c:v>
+                </c:pt>
+                <c:pt idx="2">
+                  <c:v>Q3</c:v>
+                </c:pt>
+                <c:pt idx="3">
+                  <c:v>Q4</c:v>
+                </c:pt>
+              </c:strCache>
+            </c:strRef>
+          </c:cat>
+          <c:val>
+            <c:numRef>
+              <c:f>Sheet1!$B$2:$B$5</c:f>
+              <c:numCache>
+                <c:formatCode>General</c:formatCode>
+                <c:ptCount val="4"/>
+                <c:pt idx="0">
+                  <c:v>42</c:v>
+                </c:pt>
+                <c:pt idx="1">
+                  <c:v>58</c:v>
+                </c:pt>
+                <c:pt idx="2">
+                  <c:v>55</c:v>
+                </c:pt>
+                <c:pt idx="3">
+                  <c:v>66</c:v>
+                </c:pt>
+              </c:numCache>
+            </c:numRef>
+          </c:val>
+        </c:ser>
+        <c:ser>
+          <c:idx val="1"/>
+          <c:order val="1"/>
+          <c:tx>
+            <c:strRef>
+              <c:f>Sheet1!$B$1</c:f>
+              <c:strCache>
+                <c:ptCount val="1"/>
+                <c:pt idx="0">
+                  <c:v>High</c:v>
+                </c:pt>
+              </c:strCache>
+            </c:strRef>
+          </c:tx>
+          <c:spPr>
+            <a:ln>
+              <a:noFill/>
+            </a:ln>
+          </c:spPr>
+          <c:cat>
+            <c:strRef>
+              <c:f>Sheet1!$A$2:$A$5</c:f>
+              <c:strCache>
+                <c:ptCount val="4"/>
+                <c:pt idx="0">
+                  <c:v>Q1</c:v>
+                </c:pt>
+                <c:pt idx="1">
+                  <c:v>Q2</c:v>
+                </c:pt>
+                <c:pt idx="2">
+                  <c:v>Q3</c:v>
+                </c:pt>
+                <c:pt idx="3">
+                  <c:v>Q4</c:v>
+                </c:pt>
+              </c:strCache>
+            </c:strRef>
+          </c:cat>
+          <c:val>
+            <c:numRef>
+              <c:f>Sheet1!$B$2:$B$5</c:f>
+              <c:numCache>
+                <c:formatCode>General</c:formatCode>
+                <c:ptCount val="4"/>
+                <c:pt idx="0">
+                  <c:v>50</c:v>
+                </c:pt>
+                <c:pt idx="1">
+                  <c:v>65</c:v>
+                </c:pt>
+                <c:pt idx="2">
+                  <c:v>62</c:v>
+                </c:pt>
+                <c:pt idx="3">
+                  <c:v>74</c:v>
+                </c:pt>
+              </c:numCache>
+            </c:numRef>
+          </c:val>
+        </c:ser>
+        <c:ser>
+          <c:idx val="2"/>
+          <c:order val="2"/>
+          <c:tx>
+            <c:strRef>
+              <c:f>Sheet1!$B$1</c:f>
+              <c:strCache>
+                <c:ptCount val="1"/>
+                <c:pt idx="0">
+                  <c:v>Low</c:v>
+                </c:pt>
+              </c:strCache>
+            </c:strRef>
+          </c:tx>
+          <c:spPr>
+            <a:ln>
+              <a:noFill/>
+            </a:ln>
+          </c:spPr>
+          <c:cat>
+            <c:strRef>
+              <c:f>Sheet1!$A$2:$A$5</c:f>
+              <c:strCache>
+                <c:ptCount val="4"/>
+                <c:pt idx="0">
+                  <c:v>Q1</c:v>
+                </c:pt>
+                <c:pt idx="1">
+                  <c:v>Q2</c:v>
+                </c:pt>
+                <c:pt idx="2">
+                  <c:v>Q3</c:v>
+                </c:pt>
+                <c:pt idx="3">
+                  <c:v>Q4</c:v>
+                </c:pt>
+              </c:strCache>
+            </c:strRef>
+          </c:cat>
+          <c:val>
+            <c:numRef>
+              <c:f>Sheet1!$B$2:$B$5</c:f>
+              <c:numCache>
+                <c:formatCode>General</c:formatCode>
+                <c:ptCount val="4"/>
+                <c:pt idx="0">
+                  <c:v>38</c:v>
+                </c:pt>
+                <c:pt idx="1">
+                  <c:v>52</c:v>
+                </c:pt>
+                <c:pt idx="2">
+                  <c:v>51</c:v>
+                </c:pt>
+                <c:pt idx="3">
+                  <c:v>61</c:v>
+                </c:pt>
+              </c:numCache>
+            </c:numRef>
+          </c:val>
+        </c:ser>
+        <c:ser>
+          <c:idx val="3"/>
+          <c:order val="3"/>
+          <c:tx>
+            <c:strRef>
+              <c:f>Sheet1!$B$1</c:f>
+              <c:strCache>
+                <c:ptCount val="1"/>
+                <c:pt idx="0">
+                  <c:v>Close</c:v>
+                </c:pt>
+              </c:strCache>
+            </c:strRef>
+          </c:tx>
+          <c:spPr>
+            <a:ln>
+              <a:noFill/>
+            </a:ln>
+          </c:spPr>
+          <c:cat>
+            <c:strRef>
+              <c:f>Sheet1!$A$2:$A$5</c:f>
+              <c:strCache>
+                <c:ptCount val="4"/>
+                <c:pt idx="0">
+                  <c:v>Q1</c:v>
+                </c:pt>
+                <c:pt idx="1">
+                  <c:v>Q2</c:v>
+                </c:pt>
+                <c:pt idx="2">
+                  <c:v>Q3</c:v>
+                </c:pt>
+                <c:pt idx="3">
+                  <c:v>Q4</c:v>
+                </c:pt>
+              </c:strCache>
+            </c:strRef>
+          </c:cat>
+          <c:val>
+            <c:numRef>
+              <c:f>Sheet1!$B$2:$B$5</c:f>
+              <c:numCache>
+                <c:formatCode>General</c:formatCode>
+                <c:ptCount val="4"/>
+                <c:pt idx="0">
+                  <c:v>47</c:v>
+                </c:pt>
+                <c:pt idx="1">
+                  <c:v>61</c:v>
+                </c:pt>
+                <c:pt idx="2">
+                  <c:v>53</c:v>
+                </c:pt>
+                <c:pt idx="3">
+                  <c:v>71</c:v>
+                </c:pt>
+              </c:numCache>
+            </c:numRef>
+          </c:val>
+        </c:ser>
+        <c:hiLowLines/>
+        <c:upDownBars>
+          <c:gapWidth val="150"/>
+        </c:upDownBars>
+        <c:axId val="111111111"/>
+        <c:axId val="222222222"/>
+      </c:stockChart>
+      <c:catAx>
+        <c:axId val="111111111"/>
+        <c:scaling>
+          <c:orientation val="minMax"/>
+        </c:scaling>
+        <c:delete val="0"/>
+        <c:axPos val="b"/>
+        <c:crossAx val="222222222"/>
+      </c:catAx>
+      <c:valAx>
+        <c:axId val="222222222"/>
+        <c:scaling>
+          <c:orientation val="minMax"/>
+        </c:scaling>
+        <c:delete val="0"/>
+        <c:axPos val="l"/>
+        <c:crossAx val="111111111"/>
+      </c:valAx>
+    </c:plotArea>
+    <c:legend>
+      <c:legendPos val="b"/>
+      <c:overlay val="0"/>
+    </c:legend>
+    <c:plotVisOnly val="1"/>
+  </c:chart>
+</c:chartSpace>
+</file>
+
+<file path=ppt/charts/chart17.xml><?xml version="1.0" encoding="utf-8"?>
+<c:chartSpace xmlns:c="http://schemas.openxmlformats.org/drawingml/2006/chart" xmlns:a="http://schemas.openxmlformats.org/drawingml/2006/main" xmlns:r="http://schemas.openxmlformats.org/officeDocument/2006/relationships">
+  <c:chart>
+    <c:title>
+      <c:tx>
+        <c:rich>
+          <a:bodyPr/>
+          <a:p>
+            <a:r>
+              <a:t>Surface</a:t>
+            </a:r>
+          </a:p>
+        </c:rich>
+      </c:tx>
+      <c:overlay val="0"/>
+    </c:title>
+    <c:autoTitleDeleted val="0"/>
+    <c:plotArea>
+      <c:layout/>
+      <c:surfaceChart>
+        <c:wireframe val="0"/>
+        <c:ser>
+          <c:idx val="0"/>
+          <c:order val="0"/>
+          <c:tx>
+            <c:strRef>
+              <c:f>Sheet1!$B$1</c:f>
+              <c:strCache>
+                <c:ptCount val="1"/>
+                <c:pt idx="0">
+                  <c:v>Revenue</c:v>
+                </c:pt>
+              </c:strCache>
+            </c:strRef>
+          </c:tx>
+          <c:spPr>
+            <a:solidFill>
+              <a:srgbClr val="4472C4"/>
+            </a:solidFill>
+          </c:spPr>
+          <c:cat>
+            <c:strRef>
+              <c:f>Sheet1!$A$2:$A$5</c:f>
+              <c:strCache>
+                <c:ptCount val="4"/>
+                <c:pt idx="0">
+                  <c:v>Q1</c:v>
+                </c:pt>
+                <c:pt idx="1">
+                  <c:v>Q2</c:v>
+                </c:pt>
+                <c:pt idx="2">
+                  <c:v>Q3</c:v>
+                </c:pt>
+                <c:pt idx="3">
+                  <c:v>Q4</c:v>
+                </c:pt>
+              </c:strCache>
+            </c:strRef>
+          </c:cat>
+          <c:val>
+            <c:numRef>
+              <c:f>Sheet1!$B$2:$B$5</c:f>
+              <c:numCache>
+                <c:formatCode>General</c:formatCode>
+                <c:ptCount val="4"/>
+                <c:pt idx="0">
+                  <c:v>45</c:v>
+                </c:pt>
+                <c:pt idx="1">
+                  <c:v>62</c:v>
+                </c:pt>
+                <c:pt idx="2">
+                  <c:v>58</c:v>
+                </c:pt>
+                <c:pt idx="3">
+                  <c:v>71</c:v>
+                </c:pt>
+              </c:numCache>
+            </c:numRef>
+          </c:val>
+        </c:ser>
+        <c:ser>
+          <c:idx val="1"/>
+          <c:order val="1"/>
+          <c:tx>
+            <c:strRef>
+              <c:f>Sheet1!$B$1</c:f>
+              <c:strCache>
+                <c:ptCount val="1"/>
+                <c:pt idx="0">
+                  <c:v>Cost</c:v>
+                </c:pt>
+              </c:strCache>
+            </c:strRef>
+          </c:tx>
+          <c:spPr>
+            <a:solidFill>
+              <a:srgbClr val="ED7D31"/>
+            </a:solidFill>
+          </c:spPr>
+          <c:cat>
+            <c:strRef>
+              <c:f>Sheet1!$A$2:$A$5</c:f>
+              <c:strCache>
+                <c:ptCount val="4"/>
+                <c:pt idx="0">
+                  <c:v>Q1</c:v>
+                </c:pt>
+                <c:pt idx="1">
+                  <c:v>Q2</c:v>
+                </c:pt>
+                <c:pt idx="2">
+                  <c:v>Q3</c:v>
+                </c:pt>
+                <c:pt idx="3">
+                  <c:v>Q4</c:v>
+                </c:pt>
+              </c:strCache>
+            </c:strRef>
+          </c:cat>
+          <c:val>
+            <c:numRef>
+              <c:f>Sheet1!$B$2:$B$5</c:f>
+              <c:numCache>
+                <c:formatCode>General</c:formatCode>
+                <c:ptCount val="4"/>
+                <c:pt idx="0">
+                  <c:v>30</c:v>
+                </c:pt>
+                <c:pt idx="1">
+                  <c:v>41</c:v>
+                </c:pt>
+                <c:pt idx="2">
+                  <c:v>38</c:v>
+                </c:pt>
+                <c:pt idx="3">
+                  <c:v>52</c:v>
+                </c:pt>
+              </c:numCache>
+            </c:numRef>
+          </c:val>
+        </c:ser>
+        <c:ser>
+          <c:idx val="2"/>
+          <c:order val="2"/>
+          <c:tx>
+            <c:strRef>
+              <c:f>Sheet1!$B$1</c:f>
+              <c:strCache>
+                <c:ptCount val="1"/>
+                <c:pt idx="0">
+                  <c:v>Profit</c:v>
+                </c:pt>
+              </c:strCache>
+            </c:strRef>
+          </c:tx>
+          <c:spPr>
+            <a:solidFill>
+              <a:srgbClr val="70AD47"/>
+            </a:solidFill>
+          </c:spPr>
+          <c:cat>
+            <c:strRef>
+              <c:f>Sheet1!$A$2:$A$5</c:f>
+              <c:strCache>
+                <c:ptCount val="4"/>
+                <c:pt idx="0">
+                  <c:v>Q1</c:v>
+                </c:pt>
+                <c:pt idx="1">
+                  <c:v>Q2</c:v>
+                </c:pt>
+                <c:pt idx="2">
+                  <c:v>Q3</c:v>
+                </c:pt>
+                <c:pt idx="3">
+                  <c:v>Q4</c:v>
+                </c:pt>
+              </c:strCache>
+            </c:strRef>
+          </c:cat>
+          <c:val>
+            <c:numRef>
+              <c:f>Sheet1!$B$2:$B$5</c:f>
+              <c:numCache>
+                <c:formatCode>General</c:formatCode>
+                <c:ptCount val="4"/>
+                <c:pt idx="0">
+                  <c:v>18</c:v>
+                </c:pt>
+                <c:pt idx="1">
+                  <c:v>24</c:v>
+                </c:pt>
+                <c:pt idx="2">
+                  <c:v>29</c:v>
+                </c:pt>
+                <c:pt idx="3">
+                  <c:v>33</c:v>
+                </c:pt>
+              </c:numCache>
+            </c:numRef>
+          </c:val>
+        </c:ser>
+        <c:axId val="111111111"/>
+        <c:axId val="222222222"/>
+        <c:axId val="333333333"/>
+      </c:surfaceChart>
+      <c:catAx>
+        <c:axId val="111111111"/>
+        <c:scaling>
+          <c:orientation val="minMax"/>
+        </c:scaling>
+        <c:delete val="0"/>
+        <c:axPos val="b"/>
+        <c:crossAx val="222222222"/>
+      </c:catAx>
+      <c:valAx>
+        <c:axId val="222222222"/>
+        <c:scaling>
+          <c:orientation val="minMax"/>
+        </c:scaling>
+        <c:delete val="0"/>
+        <c:axPos val="l"/>
+        <c:crossAx val="111111111"/>
+      </c:valAx>
+      <c:serAx>
+        <c:axId val="333333333"/>
+        <c:scaling>
+          <c:orientation val="minMax"/>
+        </c:scaling>
+        <c:delete val="0"/>
+        <c:axPos val="b"/>
+        <c:crossAx val="222222222"/>
+      </c:serAx>
+    </c:plotArea>
+    <c:legend>
+      <c:legendPos val="b"/>
+      <c:overlay val="0"/>
+    </c:legend>
+    <c:plotVisOnly val="1"/>
+  </c:chart>
+</c:chartSpace>
+</file>
+
+<file path=ppt/charts/chart18.xml><?xml version="1.0" encoding="utf-8"?>
+<cx:chartSpace xmlns:cx="http://schemas.microsoft.com/office/drawing/2014/chartex" xmlns:a="http://schemas.openxmlformats.org/drawingml/2006/main" xmlns:r="http://schemas.openxmlformats.org/officeDocument/2006/relationships">
+  <cx:chartData>
+    <cx:data id="0">
+      <cx:strDim type="cat">
+        <cx:f>Sheet1!$A$2:$A$5</cx:f>
+        <cx:lvl ptCount="4">
+          <cx:pt idx="0">Q1</cx:pt>
+          <cx:pt idx="1">Q2</cx:pt>
+          <cx:pt idx="2">Q3</cx:pt>
+          <cx:pt idx="3">Q4</cx:pt>
+        </cx:lvl>
+      </cx:strDim>
+      <cx:numDim type="val">
+        <cx:f>Sheet1!$B$2:$B$5</cx:f>
+        <cx:lvl ptCount="4">
+          <cx:pt idx="0">45</cx:pt>
+          <cx:pt idx="1">62</cx:pt>
+          <cx:pt idx="2">58</cx:pt>
+          <cx:pt idx="3">71</cx:pt>
+        </cx:lvl>
+      </cx:numDim>
+    </cx:data>
+  </cx:chartData>
+  <cx:chart>
+    <cx:title>
+      <cx:tx>
+        <cx:rich>
+          <a:p>
+            <a:r>
+              <a:t>Waterfall</a:t>
+            </a:r>
+          </a:p>
+        </cx:rich>
+      </cx:tx>
+    </cx:title>
+    <cx:plotArea>
+      <cx:plotAreaRegion>
+        <cx:series layoutId="waterfall" uniqueId="{00000000-0000-0000-0000-000000000000}">
+          <cx:tx>
+            <cx:txData>
+              <cx:f>Sheet1!$B$1</cx:f>
+              <cx:v>Revenue</cx:v>
+            </cx:txData>
+          </cx:tx>
+          <cx:spPr>
+            <a:solidFill>
+              <a:srgbClr val="4472C4"/>
+            </a:solidFill>
+          </cx:spPr>
+          <cx:dataId val="0"/>
+        </cx:series>
+      </cx:plotAreaRegion>
+    </cx:plotArea>
+    <cx:legend pos="b"/>
+  </cx:chart>
+</cx:chartSpace>
+</file>
+
+<file path=ppt/charts/chart19.xml><?xml version="1.0" encoding="utf-8"?>
+<cx:chartSpace xmlns:cx="http://schemas.microsoft.com/office/drawing/2014/chartex" xmlns:a="http://schemas.openxmlformats.org/drawingml/2006/main" xmlns:r="http://schemas.openxmlformats.org/officeDocument/2006/relationships">
+  <cx:chartData>
+    <cx:data id="0">
+      <cx:strDim type="cat">
+        <cx:f>Sheet1!$A$2:$A$5</cx:f>
+        <cx:lvl ptCount="4">
+          <cx:pt idx="0">Q1</cx:pt>
+          <cx:pt idx="1">Q2</cx:pt>
+          <cx:pt idx="2">Q3</cx:pt>
+          <cx:pt idx="3">Q4</cx:pt>
+        </cx:lvl>
+      </cx:strDim>
+      <cx:numDim type="val">
+        <cx:f>Sheet1!$B$2:$B$5</cx:f>
+        <cx:lvl ptCount="4">
+          <cx:pt idx="0">45</cx:pt>
+          <cx:pt idx="1">62</cx:pt>
+          <cx:pt idx="2">58</cx:pt>
+          <cx:pt idx="3">71</cx:pt>
+        </cx:lvl>
+      </cx:numDim>
+    </cx:data>
+  </cx:chartData>
+  <cx:chart>
+    <cx:title>
+      <cx:tx>
+        <cx:rich>
+          <a:p>
+            <a:r>
+              <a:t>Treemap</a:t>
+            </a:r>
+          </a:p>
+        </cx:rich>
+      </cx:tx>
+    </cx:title>
+    <cx:plotArea>
+      <cx:plotAreaRegion>
+        <cx:series layoutId="treemap" uniqueId="{00000000-0000-0000-0000-000000000000}">
+          <cx:tx>
+            <cx:txData>
+              <cx:f>Sheet1!$B$1</cx:f>
+              <cx:v>Revenue</cx:v>
+            </cx:txData>
+          </cx:tx>
+          <cx:spPr>
+            <a:solidFill>
+              <a:srgbClr val="4472C4"/>
+            </a:solidFill>
+          </cx:spPr>
+          <cx:dataId val="0"/>
+        </cx:series>
+      </cx:plotAreaRegion>
+    </cx:plotArea>
+    <cx:legend pos="b"/>
+  </cx:chart>
+</cx:chartSpace>
+</file>
+
 <file path=ppt/charts/chart2.xml><?xml version="1.0" encoding="utf-8"?>
 <c:chartSpace xmlns:c="http://schemas.openxmlformats.org/drawingml/2006/chart" xmlns:a="http://schemas.openxmlformats.org/drawingml/2006/main" xmlns:r="http://schemas.openxmlformats.org/officeDocument/2006/relationships">
   <c:chart>
@@ -979,6 +1895,65 @@
     <c:plotVisOnly val="1"/>
   </c:chart>
 </c:chartSpace>
+</file>
+
+<file path=ppt/charts/chart20.xml><?xml version="1.0" encoding="utf-8"?>
+<cx:chartSpace xmlns:cx="http://schemas.microsoft.com/office/drawing/2014/chartex" xmlns:a="http://schemas.openxmlformats.org/drawingml/2006/main" xmlns:r="http://schemas.openxmlformats.org/officeDocument/2006/relationships">
+  <cx:chartData>
+    <cx:data id="0">
+      <cx:strDim type="cat">
+        <cx:f>Sheet1!$A$2:$A$5</cx:f>
+        <cx:lvl ptCount="4">
+          <cx:pt idx="0">United States</cx:pt>
+          <cx:pt idx="1">Germany</cx:pt>
+          <cx:pt idx="2">China</cx:pt>
+          <cx:pt idx="3">Brazil</cx:pt>
+        </cx:lvl>
+      </cx:strDim>
+      <cx:numDim type="val">
+        <cx:f>Sheet1!$B$2:$B$5</cx:f>
+        <cx:lvl ptCount="4">
+          <cx:pt idx="0">45</cx:pt>
+          <cx:pt idx="1">62</cx:pt>
+          <cx:pt idx="2">58</cx:pt>
+          <cx:pt idx="3">71</cx:pt>
+        </cx:lvl>
+      </cx:numDim>
+    </cx:data>
+  </cx:chartData>
+  <cx:chart>
+    <cx:title>
+      <cx:tx>
+        <cx:rich>
+          <a:p>
+            <a:r>
+              <a:t>Region Map</a:t>
+            </a:r>
+          </a:p>
+        </cx:rich>
+      </cx:tx>
+    </cx:title>
+    <cx:plotArea>
+      <cx:plotAreaRegion>
+        <cx:series layoutId="regionMap" uniqueId="{00000000-0000-0000-0000-000000000000}">
+          <cx:tx>
+            <cx:txData>
+              <cx:f>Sheet1!$B$1</cx:f>
+              <cx:v>Revenue</cx:v>
+            </cx:txData>
+          </cx:tx>
+          <cx:spPr>
+            <a:solidFill>
+              <a:srgbClr val="4472C4"/>
+            </a:solidFill>
+          </cx:spPr>
+          <cx:dataId val="0"/>
+        </cx:series>
+      </cx:plotAreaRegion>
+    </cx:plotArea>
+    <cx:legend pos="b"/>
+  </cx:chart>
+</cx:chartSpace>
 </file>
 
 <file path=ppt/charts/chart3.xml><?xml version="1.0" encoding="utf-8"?>
@@ -3002,6 +3977,356 @@
 </p:sld>
 </file>
 
+<file path=ppt/slides/slide15.xml><?xml version="1.0" encoding="utf-8"?>
+<p:sld xmlns:a="http://schemas.openxmlformats.org/drawingml/2006/main" xmlns:r="http://schemas.openxmlformats.org/officeDocument/2006/relationships" xmlns:p="http://schemas.openxmlformats.org/presentationml/2006/main">
+  <p:cSld>
+    <p:spTree>
+      <p:nvGrpSpPr>
+        <p:cNvPr id="1" name=""/>
+        <p:cNvGrpSpPr/>
+        <p:nvPr/>
+      </p:nvGrpSpPr>
+      <p:grpSpPr>
+        <a:xfrm>
+          <a:off x="0" y="0"/>
+          <a:ext cx="0" cy="0"/>
+          <a:chOff x="0" y="0"/>
+          <a:chExt cx="0" cy="0"/>
+        </a:xfrm>
+      </p:grpSpPr>
+      <p:sp>
+        <p:nvSpPr>
+          <p:cNvPr id="15" name="Rectangle 15"/>
+          <p:cNvSpPr txBox="0"/>
+          <p:nvPr/>
+        </p:nvSpPr>
+        <p:spPr>
+          <a:xfrm>
+            <a:off x="0" y="0"/>
+            <a:ext cx="9525" cy="9525"/>
+          </a:xfrm>
+          <a:prstGeom prst="rect">
+            <a:avLst/>
+          </a:prstGeom>
+          <a:noFill/>
+        </p:spPr>
+        <p:txBody>
+          <a:bodyPr wrap="square"/>
+          <a:lstStyle/>
+          <a:p>
+            <a:pPr/>
+            <a:r>
+              <a:rPr lang="en-US" dirty="0"/>
+              <a:t>Combo</a:t>
+            </a:r>
+            <a:endParaRPr lang="en-US"/>
+          </a:p>
+        </p:txBody>
+      </p:sp>
+      <p:graphicFrame>
+        <p:nvGraphicFramePr>
+          <p:cNvPr id="115" name="Chart 15"/>
+          <p:cNvGraphicFramePr/>
+          <p:nvPr/>
+        </p:nvGraphicFramePr>
+        <p:xfrm>
+          <a:off x="571500" y="571500"/>
+          <a:ext cx="8001000" cy="4000500"/>
+        </p:xfrm>
+        <a:graphic>
+          <a:graphicData uri="http://schemas.openxmlformats.org/drawingml/2006/chart">
+            <c:chart xmlns:c="http://schemas.openxmlformats.org/drawingml/2006/chart" xmlns:r="http://schemas.openxmlformats.org/officeDocument/2006/relationships" r:id="rId2"/>
+          </a:graphicData>
+        </a:graphic>
+      </p:graphicFrame>
+    </p:spTree>
+  </p:cSld>
+  <p:clrMapOvr>
+    <a:masterClrMapping/>
+  </p:clrMapOvr>
+</p:sld>
+</file>
+
+<file path=ppt/slides/slide16.xml><?xml version="1.0" encoding="utf-8"?>
+<p:sld xmlns:a="http://schemas.openxmlformats.org/drawingml/2006/main" xmlns:r="http://schemas.openxmlformats.org/officeDocument/2006/relationships" xmlns:p="http://schemas.openxmlformats.org/presentationml/2006/main">
+  <p:cSld>
+    <p:spTree>
+      <p:nvGrpSpPr>
+        <p:cNvPr id="1" name=""/>
+        <p:cNvGrpSpPr/>
+        <p:nvPr/>
+      </p:nvGrpSpPr>
+      <p:grpSpPr>
+        <a:xfrm>
+          <a:off x="0" y="0"/>
+          <a:ext cx="0" cy="0"/>
+          <a:chOff x="0" y="0"/>
+          <a:chExt cx="0" cy="0"/>
+        </a:xfrm>
+      </p:grpSpPr>
+      <p:sp>
+        <p:nvSpPr>
+          <p:cNvPr id="16" name="Rectangle 16"/>
+          <p:cNvSpPr txBox="0"/>
+          <p:nvPr/>
+        </p:nvSpPr>
+        <p:spPr>
+          <a:xfrm>
+            <a:off x="0" y="0"/>
+            <a:ext cx="9525" cy="9525"/>
+          </a:xfrm>
+          <a:prstGeom prst="rect">
+            <a:avLst/>
+          </a:prstGeom>
+          <a:noFill/>
+        </p:spPr>
+        <p:txBody>
+          <a:bodyPr wrap="square"/>
+          <a:lstStyle/>
+          <a:p>
+            <a:pPr/>
+            <a:r>
+              <a:rPr lang="en-US" dirty="0"/>
+              <a:t>Stock</a:t>
+            </a:r>
+            <a:endParaRPr lang="en-US"/>
+          </a:p>
+        </p:txBody>
+      </p:sp>
+      <p:graphicFrame>
+        <p:nvGraphicFramePr>
+          <p:cNvPr id="116" name="Chart 16"/>
+          <p:cNvGraphicFramePr/>
+          <p:nvPr/>
+        </p:nvGraphicFramePr>
+        <p:xfrm>
+          <a:off x="571500" y="571500"/>
+          <a:ext cx="8001000" cy="4000500"/>
+        </p:xfrm>
+        <a:graphic>
+          <a:graphicData uri="http://schemas.openxmlformats.org/drawingml/2006/chart">
+            <c:chart xmlns:c="http://schemas.openxmlformats.org/drawingml/2006/chart" xmlns:r="http://schemas.openxmlformats.org/officeDocument/2006/relationships" r:id="rId2"/>
+          </a:graphicData>
+        </a:graphic>
+      </p:graphicFrame>
+    </p:spTree>
+  </p:cSld>
+  <p:clrMapOvr>
+    <a:masterClrMapping/>
+  </p:clrMapOvr>
+</p:sld>
+</file>
+
+<file path=ppt/slides/slide17.xml><?xml version="1.0" encoding="utf-8"?>
+<p:sld xmlns:a="http://schemas.openxmlformats.org/drawingml/2006/main" xmlns:r="http://schemas.openxmlformats.org/officeDocument/2006/relationships" xmlns:p="http://schemas.openxmlformats.org/presentationml/2006/main">
+  <p:cSld>
+    <p:spTree>
+      <p:nvGrpSpPr>
+        <p:cNvPr id="1" name=""/>
+        <p:cNvGrpSpPr/>
+        <p:nvPr/>
+      </p:nvGrpSpPr>
+      <p:grpSpPr>
+        <a:xfrm>
+          <a:off x="0" y="0"/>
+          <a:ext cx="0" cy="0"/>
+          <a:chOff x="0" y="0"/>
+          <a:chExt cx="0" cy="0"/>
+        </a:xfrm>
+      </p:grpSpPr>
+      <p:sp>
+        <p:nvSpPr>
+          <p:cNvPr id="17" name="Rectangle 17"/>
+          <p:cNvSpPr txBox="0"/>
+          <p:nvPr/>
+        </p:nvSpPr>
+        <p:spPr>
+          <a:xfrm>
+            <a:off x="0" y="0"/>
+            <a:ext cx="9525" cy="9525"/>
+          </a:xfrm>
+          <a:prstGeom prst="rect">
+            <a:avLst/>
+          </a:prstGeom>
+          <a:noFill/>
+        </p:spPr>
+        <p:txBody>
+          <a:bodyPr wrap="square"/>
+          <a:lstStyle/>
+          <a:p>
+            <a:pPr/>
+            <a:r>
+              <a:rPr lang="en-US" dirty="0"/>
+              <a:t>Surface</a:t>
+            </a:r>
+            <a:endParaRPr lang="en-US"/>
+          </a:p>
+        </p:txBody>
+      </p:sp>
+      <p:graphicFrame>
+        <p:nvGraphicFramePr>
+          <p:cNvPr id="117" name="Chart 17"/>
+          <p:cNvGraphicFramePr/>
+          <p:nvPr/>
+        </p:nvGraphicFramePr>
+        <p:xfrm>
+          <a:off x="571500" y="571500"/>
+          <a:ext cx="8001000" cy="4000500"/>
+        </p:xfrm>
+        <a:graphic>
+          <a:graphicData uri="http://schemas.openxmlformats.org/drawingml/2006/chart">
+            <c:chart xmlns:c="http://schemas.openxmlformats.org/drawingml/2006/chart" xmlns:r="http://schemas.openxmlformats.org/officeDocument/2006/relationships" r:id="rId2"/>
+          </a:graphicData>
+        </a:graphic>
+      </p:graphicFrame>
+    </p:spTree>
+  </p:cSld>
+  <p:clrMapOvr>
+    <a:masterClrMapping/>
+  </p:clrMapOvr>
+</p:sld>
+</file>
+
+<file path=ppt/slides/slide18.xml><?xml version="1.0" encoding="utf-8"?>
+<p:sld xmlns:a="http://schemas.openxmlformats.org/drawingml/2006/main" xmlns:r="http://schemas.openxmlformats.org/officeDocument/2006/relationships" xmlns:p="http://schemas.openxmlformats.org/presentationml/2006/main">
+  <p:cSld>
+    <p:spTree>
+      <p:nvGrpSpPr>
+        <p:cNvPr id="1" name=""/>
+        <p:cNvGrpSpPr/>
+        <p:nvPr/>
+      </p:nvGrpSpPr>
+      <p:grpSpPr>
+        <a:xfrm>
+          <a:off x="0" y="0"/>
+          <a:ext cx="0" cy="0"/>
+          <a:chOff x="0" y="0"/>
+          <a:chExt cx="0" cy="0"/>
+        </a:xfrm>
+      </p:grpSpPr>
+      <p:sp>
+        <p:nvSpPr>
+          <p:cNvPr id="18" name="Rectangle 18"/>
+          <p:cNvSpPr txBox="0"/>
+          <p:nvPr/>
+        </p:nvSpPr>
+        <p:spPr>
+          <a:xfrm>
+            <a:off x="0" y="0"/>
+            <a:ext cx="9525" cy="9525"/>
+          </a:xfrm>
+          <a:prstGeom prst="rect">
+            <a:avLst/>
+          </a:prstGeom>
+          <a:noFill/>
+        </p:spPr>
+        <p:txBody>
+          <a:bodyPr wrap="square"/>
+          <a:lstStyle/>
+          <a:p>
+            <a:pPr/>
+            <a:r>
+              <a:rPr lang="en-US" dirty="0"/>
+              <a:t>Waterfall</a:t>
+            </a:r>
+            <a:endParaRPr lang="en-US"/>
+          </a:p>
+        </p:txBody>
+      </p:sp>
+      <p:graphicFrame>
+        <p:nvGraphicFramePr>
+          <p:cNvPr id="118" name="Chart 18"/>
+          <p:cNvGraphicFramePr/>
+          <p:nvPr/>
+        </p:nvGraphicFramePr>
+        <p:xfrm>
+          <a:off x="571500" y="571500"/>
+          <a:ext cx="8001000" cy="4000500"/>
+        </p:xfrm>
+        <a:graphic>
+          <a:graphicData uri="http://schemas.microsoft.com/office/drawing/2014/chartex">
+            <cx:chart xmlns:cx="http://schemas.microsoft.com/office/drawing/2014/chartex" xmlns:r="http://schemas.openxmlformats.org/officeDocument/2006/relationships" r:id="rId2"/>
+          </a:graphicData>
+        </a:graphic>
+      </p:graphicFrame>
+    </p:spTree>
+  </p:cSld>
+  <p:clrMapOvr>
+    <a:masterClrMapping/>
+  </p:clrMapOvr>
+</p:sld>
+</file>
+
+<file path=ppt/slides/slide19.xml><?xml version="1.0" encoding="utf-8"?>
+<p:sld xmlns:a="http://schemas.openxmlformats.org/drawingml/2006/main" xmlns:r="http://schemas.openxmlformats.org/officeDocument/2006/relationships" xmlns:p="http://schemas.openxmlformats.org/presentationml/2006/main">
+  <p:cSld>
+    <p:spTree>
+      <p:nvGrpSpPr>
+        <p:cNvPr id="1" name=""/>
+        <p:cNvGrpSpPr/>
+        <p:nvPr/>
+      </p:nvGrpSpPr>
+      <p:grpSpPr>
+        <a:xfrm>
+          <a:off x="0" y="0"/>
+          <a:ext cx="0" cy="0"/>
+          <a:chOff x="0" y="0"/>
+          <a:chExt cx="0" cy="0"/>
+        </a:xfrm>
+      </p:grpSpPr>
+      <p:sp>
+        <p:nvSpPr>
+          <p:cNvPr id="19" name="Rectangle 19"/>
+          <p:cNvSpPr txBox="0"/>
+          <p:nvPr/>
+        </p:nvSpPr>
+        <p:spPr>
+          <a:xfrm>
+            <a:off x="0" y="0"/>
+            <a:ext cx="9525" cy="9525"/>
+          </a:xfrm>
+          <a:prstGeom prst="rect">
+            <a:avLst/>
+          </a:prstGeom>
+          <a:noFill/>
+        </p:spPr>
+        <p:txBody>
+          <a:bodyPr wrap="square"/>
+          <a:lstStyle/>
+          <a:p>
+            <a:pPr/>
+            <a:r>
+              <a:rPr lang="en-US" dirty="0"/>
+              <a:t>Treemap</a:t>
+            </a:r>
+            <a:endParaRPr lang="en-US"/>
+          </a:p>
+        </p:txBody>
+      </p:sp>
+      <p:graphicFrame>
+        <p:nvGraphicFramePr>
+          <p:cNvPr id="119" name="Chart 19"/>
+          <p:cNvGraphicFramePr/>
+          <p:nvPr/>
+        </p:nvGraphicFramePr>
+        <p:xfrm>
+          <a:off x="571500" y="571500"/>
+          <a:ext cx="8001000" cy="4000500"/>
+        </p:xfrm>
+        <a:graphic>
+          <a:graphicData uri="http://schemas.microsoft.com/office/drawing/2014/chartex">
+            <cx:chart xmlns:cx="http://schemas.microsoft.com/office/drawing/2014/chartex" xmlns:r="http://schemas.openxmlformats.org/officeDocument/2006/relationships" r:id="rId2"/>
+          </a:graphicData>
+        </a:graphic>
+      </p:graphicFrame>
+    </p:spTree>
+  </p:cSld>
+  <p:clrMapOvr>
+    <a:masterClrMapping/>
+  </p:clrMapOvr>
+</p:sld>
+</file>
+
 <file path=ppt/slides/slide2.xml><?xml version="1.0" encoding="utf-8"?>
 <p:sld xmlns:a="http://schemas.openxmlformats.org/drawingml/2006/main" xmlns:r="http://schemas.openxmlformats.org/officeDocument/2006/relationships" xmlns:p="http://schemas.openxmlformats.org/presentationml/2006/main">
   <p:cSld>
@@ -3061,6 +4386,76 @@
         <a:graphic>
           <a:graphicData uri="http://schemas.openxmlformats.org/drawingml/2006/chart">
             <c:chart xmlns:c="http://schemas.openxmlformats.org/drawingml/2006/chart" xmlns:r="http://schemas.openxmlformats.org/officeDocument/2006/relationships" r:id="rId2"/>
+          </a:graphicData>
+        </a:graphic>
+      </p:graphicFrame>
+    </p:spTree>
+  </p:cSld>
+  <p:clrMapOvr>
+    <a:masterClrMapping/>
+  </p:clrMapOvr>
+</p:sld>
+</file>
+
+<file path=ppt/slides/slide20.xml><?xml version="1.0" encoding="utf-8"?>
+<p:sld xmlns:a="http://schemas.openxmlformats.org/drawingml/2006/main" xmlns:r="http://schemas.openxmlformats.org/officeDocument/2006/relationships" xmlns:p="http://schemas.openxmlformats.org/presentationml/2006/main">
+  <p:cSld>
+    <p:spTree>
+      <p:nvGrpSpPr>
+        <p:cNvPr id="1" name=""/>
+        <p:cNvGrpSpPr/>
+        <p:nvPr/>
+      </p:nvGrpSpPr>
+      <p:grpSpPr>
+        <a:xfrm>
+          <a:off x="0" y="0"/>
+          <a:ext cx="0" cy="0"/>
+          <a:chOff x="0" y="0"/>
+          <a:chExt cx="0" cy="0"/>
+        </a:xfrm>
+      </p:grpSpPr>
+      <p:sp>
+        <p:nvSpPr>
+          <p:cNvPr id="20" name="Rectangle 20"/>
+          <p:cNvSpPr txBox="0"/>
+          <p:nvPr/>
+        </p:nvSpPr>
+        <p:spPr>
+          <a:xfrm>
+            <a:off x="0" y="0"/>
+            <a:ext cx="9525" cy="9525"/>
+          </a:xfrm>
+          <a:prstGeom prst="rect">
+            <a:avLst/>
+          </a:prstGeom>
+          <a:noFill/>
+        </p:spPr>
+        <p:txBody>
+          <a:bodyPr wrap="square"/>
+          <a:lstStyle/>
+          <a:p>
+            <a:pPr/>
+            <a:r>
+              <a:rPr lang="en-US" dirty="0"/>
+              <a:t>Region Map</a:t>
+            </a:r>
+            <a:endParaRPr lang="en-US"/>
+          </a:p>
+        </p:txBody>
+      </p:sp>
+      <p:graphicFrame>
+        <p:nvGraphicFramePr>
+          <p:cNvPr id="120" name="Chart 20"/>
+          <p:cNvGraphicFramePr/>
+          <p:nvPr/>
+        </p:nvGraphicFramePr>
+        <p:xfrm>
+          <a:off x="571500" y="571500"/>
+          <a:ext cx="8001000" cy="4000500"/>
+        </p:xfrm>
+        <a:graphic>
+          <a:graphicData uri="http://schemas.microsoft.com/office/drawing/2014/chartex">
+            <cx:chart xmlns:cx="http://schemas.microsoft.com/office/drawing/2014/chartex" xmlns:r="http://schemas.openxmlformats.org/officeDocument/2006/relationships" r:id="rId2"/>
           </a:graphicData>
         </a:graphic>
       </p:graphicFrame>
